--- a/Chap/Database/Presentations/SQL/DBSQL_MTQuery.pptx
+++ b/Chap/Database/Presentations/SQL/DBSQL_MTQuery.pptx
@@ -264,7 +264,7 @@
           <a:p>
             <a:fld id="{E15B7D8E-2A20-4C0E-991C-872DBB7459A8}" type="datetimeFigureOut">
               <a:rPr lang="da-DK" smtClean="0"/>
-              <a:t>06-02-2025</a:t>
+              <a:t>26-02-2025</a:t>
             </a:fld>
             <a:endParaRPr lang="da-DK"/>
           </a:p>
@@ -322,13 +322,13 @@
   <p:clrMapOvr>
     <a:masterClrMapping/>
   </p:clrMapOvr>
-  <mc:AlternateContent xmlns:mc="http://schemas.openxmlformats.org/markup-compatibility/2006">
-    <mc:Choice xmlns:p14="http://schemas.microsoft.com/office/powerpoint/2010/main" Requires="p14">
+  <mc:AlternateContent xmlns:mc="http://schemas.openxmlformats.org/markup-compatibility/2006" xmlns:p14="http://schemas.microsoft.com/office/powerpoint/2010/main">
+    <mc:Choice Requires="p14">
       <p:transition spd="med" p14:dur="700">
         <p:fade/>
       </p:transition>
     </mc:Choice>
-    <mc:Fallback>
+    <mc:Fallback xmlns="">
       <p:transition spd="med">
         <p:fade/>
       </p:transition>
@@ -444,7 +444,7 @@
           <a:p>
             <a:fld id="{E15B7D8E-2A20-4C0E-991C-872DBB7459A8}" type="datetimeFigureOut">
               <a:rPr lang="da-DK" smtClean="0"/>
-              <a:t>06-02-2025</a:t>
+              <a:t>26-02-2025</a:t>
             </a:fld>
             <a:endParaRPr lang="da-DK"/>
           </a:p>
@@ -502,13 +502,13 @@
   <p:clrMapOvr>
     <a:masterClrMapping/>
   </p:clrMapOvr>
-  <mc:AlternateContent xmlns:mc="http://schemas.openxmlformats.org/markup-compatibility/2006">
-    <mc:Choice xmlns:p14="http://schemas.microsoft.com/office/powerpoint/2010/main" Requires="p14">
+  <mc:AlternateContent xmlns:mc="http://schemas.openxmlformats.org/markup-compatibility/2006" xmlns:p14="http://schemas.microsoft.com/office/powerpoint/2010/main">
+    <mc:Choice Requires="p14">
       <p:transition spd="med" p14:dur="700">
         <p:fade/>
       </p:transition>
     </mc:Choice>
-    <mc:Fallback>
+    <mc:Fallback xmlns="">
       <p:transition spd="med">
         <p:fade/>
       </p:transition>
@@ -634,7 +634,7 @@
           <a:p>
             <a:fld id="{E15B7D8E-2A20-4C0E-991C-872DBB7459A8}" type="datetimeFigureOut">
               <a:rPr lang="da-DK" smtClean="0"/>
-              <a:t>06-02-2025</a:t>
+              <a:t>26-02-2025</a:t>
             </a:fld>
             <a:endParaRPr lang="da-DK"/>
           </a:p>
@@ -692,13 +692,13 @@
   <p:clrMapOvr>
     <a:masterClrMapping/>
   </p:clrMapOvr>
-  <mc:AlternateContent xmlns:mc="http://schemas.openxmlformats.org/markup-compatibility/2006">
-    <mc:Choice xmlns:p14="http://schemas.microsoft.com/office/powerpoint/2010/main" Requires="p14">
+  <mc:AlternateContent xmlns:mc="http://schemas.openxmlformats.org/markup-compatibility/2006" xmlns:p14="http://schemas.microsoft.com/office/powerpoint/2010/main">
+    <mc:Choice Requires="p14">
       <p:transition spd="med" p14:dur="700">
         <p:fade/>
       </p:transition>
     </mc:Choice>
-    <mc:Fallback>
+    <mc:Fallback xmlns="">
       <p:transition spd="med">
         <p:fade/>
       </p:transition>
@@ -814,7 +814,7 @@
           <a:p>
             <a:fld id="{E15B7D8E-2A20-4C0E-991C-872DBB7459A8}" type="datetimeFigureOut">
               <a:rPr lang="da-DK" smtClean="0"/>
-              <a:t>06-02-2025</a:t>
+              <a:t>26-02-2025</a:t>
             </a:fld>
             <a:endParaRPr lang="da-DK"/>
           </a:p>
@@ -872,13 +872,13 @@
   <p:clrMapOvr>
     <a:masterClrMapping/>
   </p:clrMapOvr>
-  <mc:AlternateContent xmlns:mc="http://schemas.openxmlformats.org/markup-compatibility/2006">
-    <mc:Choice xmlns:p14="http://schemas.microsoft.com/office/powerpoint/2010/main" Requires="p14">
+  <mc:AlternateContent xmlns:mc="http://schemas.openxmlformats.org/markup-compatibility/2006" xmlns:p14="http://schemas.microsoft.com/office/powerpoint/2010/main">
+    <mc:Choice Requires="p14">
       <p:transition spd="med" p14:dur="700">
         <p:fade/>
       </p:transition>
     </mc:Choice>
-    <mc:Fallback>
+    <mc:Fallback xmlns="">
       <p:transition spd="med">
         <p:fade/>
       </p:transition>
@@ -1071,7 +1071,7 @@
           <a:p>
             <a:fld id="{E15B7D8E-2A20-4C0E-991C-872DBB7459A8}" type="datetimeFigureOut">
               <a:rPr lang="da-DK" smtClean="0"/>
-              <a:t>06-02-2025</a:t>
+              <a:t>26-02-2025</a:t>
             </a:fld>
             <a:endParaRPr lang="da-DK"/>
           </a:p>
@@ -1129,13 +1129,13 @@
   <p:clrMapOvr>
     <a:masterClrMapping/>
   </p:clrMapOvr>
-  <mc:AlternateContent xmlns:mc="http://schemas.openxmlformats.org/markup-compatibility/2006">
-    <mc:Choice xmlns:p14="http://schemas.microsoft.com/office/powerpoint/2010/main" Requires="p14">
+  <mc:AlternateContent xmlns:mc="http://schemas.openxmlformats.org/markup-compatibility/2006" xmlns:p14="http://schemas.microsoft.com/office/powerpoint/2010/main">
+    <mc:Choice Requires="p14">
       <p:transition spd="med" p14:dur="700">
         <p:fade/>
       </p:transition>
     </mc:Choice>
-    <mc:Fallback>
+    <mc:Fallback xmlns="">
       <p:transition spd="med">
         <p:fade/>
       </p:transition>
@@ -1312,7 +1312,7 @@
           <a:p>
             <a:fld id="{E15B7D8E-2A20-4C0E-991C-872DBB7459A8}" type="datetimeFigureOut">
               <a:rPr lang="da-DK" smtClean="0"/>
-              <a:t>06-02-2025</a:t>
+              <a:t>26-02-2025</a:t>
             </a:fld>
             <a:endParaRPr lang="da-DK"/>
           </a:p>
@@ -1370,13 +1370,13 @@
   <p:clrMapOvr>
     <a:masterClrMapping/>
   </p:clrMapOvr>
-  <mc:AlternateContent xmlns:mc="http://schemas.openxmlformats.org/markup-compatibility/2006">
-    <mc:Choice xmlns:p14="http://schemas.microsoft.com/office/powerpoint/2010/main" Requires="p14">
+  <mc:AlternateContent xmlns:mc="http://schemas.openxmlformats.org/markup-compatibility/2006" xmlns:p14="http://schemas.microsoft.com/office/powerpoint/2010/main">
+    <mc:Choice Requires="p14">
       <p:transition spd="med" p14:dur="700">
         <p:fade/>
       </p:transition>
     </mc:Choice>
-    <mc:Fallback>
+    <mc:Fallback xmlns="">
       <p:transition spd="med">
         <p:fade/>
       </p:transition>
@@ -1688,7 +1688,7 @@
           <a:p>
             <a:fld id="{E15B7D8E-2A20-4C0E-991C-872DBB7459A8}" type="datetimeFigureOut">
               <a:rPr lang="da-DK" smtClean="0"/>
-              <a:t>06-02-2025</a:t>
+              <a:t>26-02-2025</a:t>
             </a:fld>
             <a:endParaRPr lang="da-DK"/>
           </a:p>
@@ -1746,13 +1746,13 @@
   <p:clrMapOvr>
     <a:masterClrMapping/>
   </p:clrMapOvr>
-  <mc:AlternateContent xmlns:mc="http://schemas.openxmlformats.org/markup-compatibility/2006">
-    <mc:Choice xmlns:p14="http://schemas.microsoft.com/office/powerpoint/2010/main" Requires="p14">
+  <mc:AlternateContent xmlns:mc="http://schemas.openxmlformats.org/markup-compatibility/2006" xmlns:p14="http://schemas.microsoft.com/office/powerpoint/2010/main">
+    <mc:Choice Requires="p14">
       <p:transition spd="med" p14:dur="700">
         <p:fade/>
       </p:transition>
     </mc:Choice>
-    <mc:Fallback>
+    <mc:Fallback xmlns="">
       <p:transition spd="med">
         <p:fade/>
       </p:transition>
@@ -1817,7 +1817,7 @@
           <a:p>
             <a:fld id="{E15B7D8E-2A20-4C0E-991C-872DBB7459A8}" type="datetimeFigureOut">
               <a:rPr lang="da-DK" smtClean="0"/>
-              <a:t>06-02-2025</a:t>
+              <a:t>26-02-2025</a:t>
             </a:fld>
             <a:endParaRPr lang="da-DK"/>
           </a:p>
@@ -1875,13 +1875,13 @@
   <p:clrMapOvr>
     <a:masterClrMapping/>
   </p:clrMapOvr>
-  <mc:AlternateContent xmlns:mc="http://schemas.openxmlformats.org/markup-compatibility/2006">
-    <mc:Choice xmlns:p14="http://schemas.microsoft.com/office/powerpoint/2010/main" Requires="p14">
+  <mc:AlternateContent xmlns:mc="http://schemas.openxmlformats.org/markup-compatibility/2006" xmlns:p14="http://schemas.microsoft.com/office/powerpoint/2010/main">
+    <mc:Choice Requires="p14">
       <p:transition spd="med" p14:dur="700">
         <p:fade/>
       </p:transition>
     </mc:Choice>
-    <mc:Fallback>
+    <mc:Fallback xmlns="">
       <p:transition spd="med">
         <p:fade/>
       </p:transition>
@@ -1924,7 +1924,7 @@
           <a:p>
             <a:fld id="{E15B7D8E-2A20-4C0E-991C-872DBB7459A8}" type="datetimeFigureOut">
               <a:rPr lang="da-DK" smtClean="0"/>
-              <a:t>06-02-2025</a:t>
+              <a:t>26-02-2025</a:t>
             </a:fld>
             <a:endParaRPr lang="da-DK"/>
           </a:p>
@@ -1982,13 +1982,13 @@
   <p:clrMapOvr>
     <a:masterClrMapping/>
   </p:clrMapOvr>
-  <mc:AlternateContent xmlns:mc="http://schemas.openxmlformats.org/markup-compatibility/2006">
-    <mc:Choice xmlns:p14="http://schemas.microsoft.com/office/powerpoint/2010/main" Requires="p14">
+  <mc:AlternateContent xmlns:mc="http://schemas.openxmlformats.org/markup-compatibility/2006" xmlns:p14="http://schemas.microsoft.com/office/powerpoint/2010/main">
+    <mc:Choice Requires="p14">
       <p:transition spd="med" p14:dur="700">
         <p:fade/>
       </p:transition>
     </mc:Choice>
-    <mc:Fallback>
+    <mc:Fallback xmlns="">
       <p:transition spd="med">
         <p:fade/>
       </p:transition>
@@ -2211,7 +2211,7 @@
           <a:p>
             <a:fld id="{E15B7D8E-2A20-4C0E-991C-872DBB7459A8}" type="datetimeFigureOut">
               <a:rPr lang="da-DK" smtClean="0"/>
-              <a:t>06-02-2025</a:t>
+              <a:t>26-02-2025</a:t>
             </a:fld>
             <a:endParaRPr lang="da-DK"/>
           </a:p>
@@ -2269,13 +2269,13 @@
   <p:clrMapOvr>
     <a:masterClrMapping/>
   </p:clrMapOvr>
-  <mc:AlternateContent xmlns:mc="http://schemas.openxmlformats.org/markup-compatibility/2006">
-    <mc:Choice xmlns:p14="http://schemas.microsoft.com/office/powerpoint/2010/main" Requires="p14">
+  <mc:AlternateContent xmlns:mc="http://schemas.openxmlformats.org/markup-compatibility/2006" xmlns:p14="http://schemas.microsoft.com/office/powerpoint/2010/main">
+    <mc:Choice Requires="p14">
       <p:transition spd="med" p14:dur="700">
         <p:fade/>
       </p:transition>
     </mc:Choice>
-    <mc:Fallback>
+    <mc:Fallback xmlns="">
       <p:transition spd="med">
         <p:fade/>
       </p:transition>
@@ -2475,7 +2475,7 @@
           <a:p>
             <a:fld id="{E15B7D8E-2A20-4C0E-991C-872DBB7459A8}" type="datetimeFigureOut">
               <a:rPr lang="da-DK" smtClean="0"/>
-              <a:t>06-02-2025</a:t>
+              <a:t>26-02-2025</a:t>
             </a:fld>
             <a:endParaRPr lang="da-DK"/>
           </a:p>
@@ -2533,13 +2533,13 @@
   <p:clrMapOvr>
     <a:masterClrMapping/>
   </p:clrMapOvr>
-  <mc:AlternateContent xmlns:mc="http://schemas.openxmlformats.org/markup-compatibility/2006">
-    <mc:Choice xmlns:p14="http://schemas.microsoft.com/office/powerpoint/2010/main" Requires="p14">
+  <mc:AlternateContent xmlns:mc="http://schemas.openxmlformats.org/markup-compatibility/2006" xmlns:p14="http://schemas.microsoft.com/office/powerpoint/2010/main">
+    <mc:Choice Requires="p14">
       <p:transition spd="med" p14:dur="700">
         <p:fade/>
       </p:transition>
     </mc:Choice>
-    <mc:Fallback>
+    <mc:Fallback xmlns="">
       <p:transition spd="med">
         <p:fade/>
       </p:transition>
@@ -2698,7 +2698,7 @@
           <a:p>
             <a:fld id="{E15B7D8E-2A20-4C0E-991C-872DBB7459A8}" type="datetimeFigureOut">
               <a:rPr lang="da-DK" smtClean="0"/>
-              <a:t>06-02-2025</a:t>
+              <a:t>26-02-2025</a:t>
             </a:fld>
             <a:endParaRPr lang="da-DK"/>
           </a:p>
@@ -2803,13 +2803,13 @@
     <p:sldLayoutId id="2147483658" r:id="rId10"/>
     <p:sldLayoutId id="2147483659" r:id="rId11"/>
   </p:sldLayoutIdLst>
-  <mc:AlternateContent xmlns:mc="http://schemas.openxmlformats.org/markup-compatibility/2006">
-    <mc:Choice xmlns:p14="http://schemas.microsoft.com/office/powerpoint/2010/main" Requires="p14">
+  <mc:AlternateContent xmlns:mc="http://schemas.openxmlformats.org/markup-compatibility/2006" xmlns:p14="http://schemas.microsoft.com/office/powerpoint/2010/main">
+    <mc:Choice Requires="p14">
       <p:transition spd="med" p14:dur="700">
         <p:fade/>
       </p:transition>
     </mc:Choice>
-    <mc:Fallback>
+    <mc:Fallback xmlns="">
       <p:transition spd="med">
         <p:fade/>
       </p:transition>
@@ -3164,13 +3164,13 @@
   <p:clrMapOvr>
     <a:masterClrMapping/>
   </p:clrMapOvr>
-  <mc:AlternateContent xmlns:mc="http://schemas.openxmlformats.org/markup-compatibility/2006">
-    <mc:Choice xmlns:p14="http://schemas.microsoft.com/office/powerpoint/2010/main" Requires="p14">
+  <mc:AlternateContent xmlns:mc="http://schemas.openxmlformats.org/markup-compatibility/2006" xmlns:p14="http://schemas.microsoft.com/office/powerpoint/2010/main">
+    <mc:Choice Requires="p14">
       <p:transition spd="med" p14:dur="700">
         <p:fade/>
       </p:transition>
     </mc:Choice>
-    <mc:Fallback>
+    <mc:Fallback xmlns="">
       <p:transition spd="med">
         <p:fade/>
       </p:transition>
@@ -3290,13 +3290,13 @@
   <p:clrMapOvr>
     <a:masterClrMapping/>
   </p:clrMapOvr>
-  <mc:AlternateContent xmlns:mc="http://schemas.openxmlformats.org/markup-compatibility/2006">
-    <mc:Choice xmlns:p14="http://schemas.microsoft.com/office/powerpoint/2010/main" Requires="p14">
+  <mc:AlternateContent xmlns:mc="http://schemas.openxmlformats.org/markup-compatibility/2006" xmlns:p14="http://schemas.microsoft.com/office/powerpoint/2010/main">
+    <mc:Choice Requires="p14">
       <p:transition spd="med" p14:dur="700">
         <p:fade/>
       </p:transition>
     </mc:Choice>
-    <mc:Fallback>
+    <mc:Fallback xmlns="">
       <p:transition spd="med">
         <p:fade/>
       </p:transition>
@@ -3405,13 +3405,13 @@
   <p:clrMapOvr>
     <a:masterClrMapping/>
   </p:clrMapOvr>
-  <mc:AlternateContent xmlns:mc="http://schemas.openxmlformats.org/markup-compatibility/2006">
-    <mc:Choice xmlns:p14="http://schemas.microsoft.com/office/powerpoint/2010/main" Requires="p14">
+  <mc:AlternateContent xmlns:mc="http://schemas.openxmlformats.org/markup-compatibility/2006" xmlns:p14="http://schemas.microsoft.com/office/powerpoint/2010/main">
+    <mc:Choice Requires="p14">
       <p:transition spd="med" p14:dur="700">
         <p:fade/>
       </p:transition>
     </mc:Choice>
-    <mc:Fallback>
+    <mc:Fallback xmlns="">
       <p:transition spd="med">
         <p:fade/>
       </p:transition>
@@ -3828,13 +3828,13 @@
   <p:clrMapOvr>
     <a:masterClrMapping/>
   </p:clrMapOvr>
-  <mc:AlternateContent xmlns:mc="http://schemas.openxmlformats.org/markup-compatibility/2006">
-    <mc:Choice xmlns:p14="http://schemas.microsoft.com/office/powerpoint/2010/main" Requires="p14">
+  <mc:AlternateContent xmlns:mc="http://schemas.openxmlformats.org/markup-compatibility/2006" xmlns:p14="http://schemas.microsoft.com/office/powerpoint/2010/main">
+    <mc:Choice Requires="p14">
       <p:transition spd="med" p14:dur="700">
         <p:fade/>
       </p:transition>
     </mc:Choice>
-    <mc:Fallback>
+    <mc:Fallback xmlns="">
       <p:transition spd="med">
         <p:fade/>
       </p:transition>
@@ -4176,13 +4176,13 @@
   <p:clrMapOvr>
     <a:masterClrMapping/>
   </p:clrMapOvr>
-  <mc:AlternateContent xmlns:mc="http://schemas.openxmlformats.org/markup-compatibility/2006">
-    <mc:Choice xmlns:p14="http://schemas.microsoft.com/office/powerpoint/2010/main" Requires="p14">
+  <mc:AlternateContent xmlns:mc="http://schemas.openxmlformats.org/markup-compatibility/2006" xmlns:p14="http://schemas.microsoft.com/office/powerpoint/2010/main">
+    <mc:Choice Requires="p14">
       <p:transition spd="med" p14:dur="700">
         <p:fade/>
       </p:transition>
     </mc:Choice>
-    <mc:Fallback>
+    <mc:Fallback xmlns="">
       <p:transition spd="med">
         <p:fade/>
       </p:transition>
@@ -4565,13 +4565,13 @@
   <p:clrMapOvr>
     <a:masterClrMapping/>
   </p:clrMapOvr>
-  <mc:AlternateContent xmlns:mc="http://schemas.openxmlformats.org/markup-compatibility/2006">
-    <mc:Choice xmlns:p14="http://schemas.microsoft.com/office/powerpoint/2010/main" Requires="p14">
+  <mc:AlternateContent xmlns:mc="http://schemas.openxmlformats.org/markup-compatibility/2006" xmlns:p14="http://schemas.microsoft.com/office/powerpoint/2010/main">
+    <mc:Choice Requires="p14">
       <p:transition spd="med" p14:dur="700">
         <p:fade/>
       </p:transition>
     </mc:Choice>
-    <mc:Fallback>
+    <mc:Fallback xmlns="">
       <p:transition spd="med">
         <p:fade/>
       </p:transition>
@@ -4703,13 +4703,13 @@
   <p:clrMapOvr>
     <a:masterClrMapping/>
   </p:clrMapOvr>
-  <mc:AlternateContent xmlns:mc="http://schemas.openxmlformats.org/markup-compatibility/2006">
-    <mc:Choice xmlns:p14="http://schemas.microsoft.com/office/powerpoint/2010/main" Requires="p14">
+  <mc:AlternateContent xmlns:mc="http://schemas.openxmlformats.org/markup-compatibility/2006" xmlns:p14="http://schemas.microsoft.com/office/powerpoint/2010/main">
+    <mc:Choice Requires="p14">
       <p:transition spd="med" p14:dur="700">
         <p:fade/>
       </p:transition>
     </mc:Choice>
-    <mc:Fallback>
+    <mc:Fallback xmlns="">
       <p:transition spd="med">
         <p:fade/>
       </p:transition>
@@ -8929,13 +8929,13 @@
   <p:clrMapOvr>
     <a:masterClrMapping/>
   </p:clrMapOvr>
-  <mc:AlternateContent xmlns:mc="http://schemas.openxmlformats.org/markup-compatibility/2006">
-    <mc:Choice xmlns:p14="http://schemas.microsoft.com/office/powerpoint/2010/main" Requires="p14">
+  <mc:AlternateContent xmlns:mc="http://schemas.openxmlformats.org/markup-compatibility/2006" xmlns:p14="http://schemas.microsoft.com/office/powerpoint/2010/main">
+    <mc:Choice Requires="p14">
       <p:transition spd="med" p14:dur="700">
         <p:fade/>
       </p:transition>
     </mc:Choice>
-    <mc:Fallback>
+    <mc:Fallback xmlns="">
       <p:transition spd="med">
         <p:fade/>
       </p:transition>
@@ -13508,13 +13508,13 @@
   <p:clrMapOvr>
     <a:masterClrMapping/>
   </p:clrMapOvr>
-  <mc:AlternateContent xmlns:mc="http://schemas.openxmlformats.org/markup-compatibility/2006">
-    <mc:Choice xmlns:p14="http://schemas.microsoft.com/office/powerpoint/2010/main" Requires="p14">
+  <mc:AlternateContent xmlns:mc="http://schemas.openxmlformats.org/markup-compatibility/2006" xmlns:p14="http://schemas.microsoft.com/office/powerpoint/2010/main">
+    <mc:Choice Requires="p14">
       <p:transition spd="med" p14:dur="700">
         <p:fade/>
       </p:transition>
     </mc:Choice>
-    <mc:Fallback>
+    <mc:Fallback xmlns="">
       <p:transition spd="med">
         <p:fade/>
       </p:transition>
@@ -13838,13 +13838,13 @@
   <p:clrMapOvr>
     <a:masterClrMapping/>
   </p:clrMapOvr>
-  <mc:AlternateContent xmlns:mc="http://schemas.openxmlformats.org/markup-compatibility/2006">
-    <mc:Choice xmlns:p14="http://schemas.microsoft.com/office/powerpoint/2010/main" Requires="p14">
+  <mc:AlternateContent xmlns:mc="http://schemas.openxmlformats.org/markup-compatibility/2006" xmlns:p14="http://schemas.microsoft.com/office/powerpoint/2010/main">
+    <mc:Choice Requires="p14">
       <p:transition spd="med" p14:dur="700">
         <p:fade/>
       </p:transition>
     </mc:Choice>
-    <mc:Fallback>
+    <mc:Fallback xmlns="">
       <p:transition spd="med">
         <p:fade/>
       </p:transition>
@@ -13971,13 +13971,13 @@
   <p:clrMapOvr>
     <a:masterClrMapping/>
   </p:clrMapOvr>
-  <mc:AlternateContent xmlns:mc="http://schemas.openxmlformats.org/markup-compatibility/2006">
-    <mc:Choice xmlns:p14="http://schemas.microsoft.com/office/powerpoint/2010/main" Requires="p14">
+  <mc:AlternateContent xmlns:mc="http://schemas.openxmlformats.org/markup-compatibility/2006" xmlns:p14="http://schemas.microsoft.com/office/powerpoint/2010/main">
+    <mc:Choice Requires="p14">
       <p:transition spd="med" p14:dur="700">
         <p:fade/>
       </p:transition>
     </mc:Choice>
-    <mc:Fallback>
+    <mc:Fallback xmlns="">
       <p:transition spd="med">
         <p:fade/>
       </p:transition>
@@ -14246,13 +14246,13 @@
   <p:clrMapOvr>
     <a:masterClrMapping/>
   </p:clrMapOvr>
-  <mc:AlternateContent xmlns:mc="http://schemas.openxmlformats.org/markup-compatibility/2006">
-    <mc:Choice xmlns:p14="http://schemas.microsoft.com/office/powerpoint/2010/main" Requires="p14">
+  <mc:AlternateContent xmlns:mc="http://schemas.openxmlformats.org/markup-compatibility/2006" xmlns:p14="http://schemas.microsoft.com/office/powerpoint/2010/main">
+    <mc:Choice Requires="p14">
       <p:transition spd="med" p14:dur="700">
         <p:fade/>
       </p:transition>
     </mc:Choice>
-    <mc:Fallback>
+    <mc:Fallback xmlns="">
       <p:transition spd="med">
         <p:fade/>
       </p:transition>
@@ -14360,13 +14360,13 @@
   <p:clrMapOvr>
     <a:masterClrMapping/>
   </p:clrMapOvr>
-  <mc:AlternateContent xmlns:mc="http://schemas.openxmlformats.org/markup-compatibility/2006">
-    <mc:Choice xmlns:p14="http://schemas.microsoft.com/office/powerpoint/2010/main" Requires="p14">
+  <mc:AlternateContent xmlns:mc="http://schemas.openxmlformats.org/markup-compatibility/2006" xmlns:p14="http://schemas.microsoft.com/office/powerpoint/2010/main">
+    <mc:Choice Requires="p14">
       <p:transition spd="med" p14:dur="700">
         <p:fade/>
       </p:transition>
     </mc:Choice>
-    <mc:Fallback>
+    <mc:Fallback xmlns="">
       <p:transition spd="med">
         <p:fade/>
       </p:transition>
@@ -14686,13 +14686,13 @@
   <p:clrMapOvr>
     <a:masterClrMapping/>
   </p:clrMapOvr>
-  <mc:AlternateContent xmlns:mc="http://schemas.openxmlformats.org/markup-compatibility/2006">
-    <mc:Choice xmlns:p14="http://schemas.microsoft.com/office/powerpoint/2010/main" Requires="p14">
+  <mc:AlternateContent xmlns:mc="http://schemas.openxmlformats.org/markup-compatibility/2006" xmlns:p14="http://schemas.microsoft.com/office/powerpoint/2010/main">
+    <mc:Choice Requires="p14">
       <p:transition spd="med" p14:dur="700">
         <p:fade/>
       </p:transition>
     </mc:Choice>
-    <mc:Fallback>
+    <mc:Fallback xmlns="">
       <p:transition spd="med">
         <p:fade/>
       </p:transition>
@@ -15012,13 +15012,13 @@
   <p:clrMapOvr>
     <a:masterClrMapping/>
   </p:clrMapOvr>
-  <mc:AlternateContent xmlns:mc="http://schemas.openxmlformats.org/markup-compatibility/2006">
-    <mc:Choice xmlns:p14="http://schemas.microsoft.com/office/powerpoint/2010/main" Requires="p14">
+  <mc:AlternateContent xmlns:mc="http://schemas.openxmlformats.org/markup-compatibility/2006" xmlns:p14="http://schemas.microsoft.com/office/powerpoint/2010/main">
+    <mc:Choice Requires="p14">
       <p:transition spd="med" p14:dur="700">
         <p:fade/>
       </p:transition>
     </mc:Choice>
-    <mc:Fallback>
+    <mc:Fallback xmlns="">
       <p:transition spd="med">
         <p:fade/>
       </p:transition>
@@ -15391,13 +15391,13 @@
   <p:clrMapOvr>
     <a:masterClrMapping/>
   </p:clrMapOvr>
-  <mc:AlternateContent xmlns:mc="http://schemas.openxmlformats.org/markup-compatibility/2006">
-    <mc:Choice xmlns:p14="http://schemas.microsoft.com/office/powerpoint/2010/main" Requires="p14">
+  <mc:AlternateContent xmlns:mc="http://schemas.openxmlformats.org/markup-compatibility/2006" xmlns:p14="http://schemas.microsoft.com/office/powerpoint/2010/main">
+    <mc:Choice Requires="p14">
       <p:transition spd="med" p14:dur="700">
         <p:fade/>
       </p:transition>
     </mc:Choice>
-    <mc:Fallback>
+    <mc:Fallback xmlns="">
       <p:transition spd="med">
         <p:fade/>
       </p:transition>
@@ -15543,13 +15543,13 @@
   <p:clrMapOvr>
     <a:masterClrMapping/>
   </p:clrMapOvr>
-  <mc:AlternateContent xmlns:mc="http://schemas.openxmlformats.org/markup-compatibility/2006">
-    <mc:Choice xmlns:p14="http://schemas.microsoft.com/office/powerpoint/2010/main" Requires="p14">
+  <mc:AlternateContent xmlns:mc="http://schemas.openxmlformats.org/markup-compatibility/2006" xmlns:p14="http://schemas.microsoft.com/office/powerpoint/2010/main">
+    <mc:Choice Requires="p14">
       <p:transition spd="med" p14:dur="700">
         <p:fade/>
       </p:transition>
     </mc:Choice>
-    <mc:Fallback>
+    <mc:Fallback xmlns="">
       <p:transition spd="med">
         <p:fade/>
       </p:transition>
@@ -19467,13 +19467,13 @@
   <p:clrMapOvr>
     <a:masterClrMapping/>
   </p:clrMapOvr>
-  <mc:AlternateContent xmlns:mc="http://schemas.openxmlformats.org/markup-compatibility/2006">
-    <mc:Choice xmlns:p14="http://schemas.microsoft.com/office/powerpoint/2010/main" Requires="p14">
+  <mc:AlternateContent xmlns:mc="http://schemas.openxmlformats.org/markup-compatibility/2006" xmlns:p14="http://schemas.microsoft.com/office/powerpoint/2010/main">
+    <mc:Choice Requires="p14">
       <p:transition spd="med" p14:dur="700">
         <p:fade/>
       </p:transition>
     </mc:Choice>
-    <mc:Fallback>
+    <mc:Fallback xmlns="">
       <p:transition spd="med">
         <p:fade/>
       </p:transition>
@@ -19508,7 +19508,7 @@
           <p:nvPr>
             <p:extLst>
               <p:ext uri="{D42A27DB-BD31-4B8C-83A1-F6EECF244321}">
-                <p14:modId xmlns:p14="http://schemas.microsoft.com/office/powerpoint/2010/main" val="3765706834"/>
+                <p14:modId xmlns:p14="http://schemas.microsoft.com/office/powerpoint/2010/main" val="1621974063"/>
               </p:ext>
             </p:extLst>
           </p:nvPr>
@@ -20436,7 +20436,7 @@
                           <a:effectLst/>
                           <a:latin typeface="+mn-lt"/>
                         </a:rPr>
-                        <a:t>04-06-1911</a:t>
+                        <a:t>1911</a:t>
                       </a:r>
                     </a:p>
                   </a:txBody>
@@ -20893,7 +20893,7 @@
                           <a:effectLst/>
                           <a:latin typeface="+mn-lt"/>
                         </a:rPr>
-                        <a:t>12-11-1959</a:t>
+                        <a:t>1959</a:t>
                       </a:r>
                     </a:p>
                   </a:txBody>
@@ -21350,7 +21350,7 @@
                           <a:effectLst/>
                           <a:latin typeface="+mn-lt"/>
                         </a:rPr>
-                        <a:t>30-01-1922</a:t>
+                        <a:t>1922</a:t>
                       </a:r>
                     </a:p>
                   </a:txBody>
@@ -21807,7 +21807,7 @@
                           <a:effectLst/>
                           <a:latin typeface="+mn-lt"/>
                         </a:rPr>
-                        <a:t>10-10-1949</a:t>
+                        <a:t>1949</a:t>
                       </a:r>
                     </a:p>
                   </a:txBody>
@@ -22264,7 +22264,7 @@
                           <a:effectLst/>
                           <a:latin typeface="+mn-lt"/>
                         </a:rPr>
-                        <a:t>28-09-1964</a:t>
+                        <a:t>1964</a:t>
                       </a:r>
                     </a:p>
                   </a:txBody>
@@ -22721,7 +22721,7 @@
                           <a:effectLst/>
                           <a:latin typeface="+mn-lt"/>
                         </a:rPr>
-                        <a:t>02-07-1980</a:t>
+                        <a:t>1980</a:t>
                       </a:r>
                     </a:p>
                   </a:txBody>
@@ -23178,7 +23178,7 @@
                           <a:effectLst/>
                           <a:latin typeface="+mn-lt"/>
                         </a:rPr>
-                        <a:t>01-08-1966</a:t>
+                        <a:t>1966</a:t>
                       </a:r>
                     </a:p>
                   </a:txBody>
@@ -23391,13 +23391,13 @@
   <p:clrMapOvr>
     <a:masterClrMapping/>
   </p:clrMapOvr>
-  <mc:AlternateContent xmlns:mc="http://schemas.openxmlformats.org/markup-compatibility/2006">
-    <mc:Choice xmlns:p14="http://schemas.microsoft.com/office/powerpoint/2010/main" Requires="p14">
+  <mc:AlternateContent xmlns:mc="http://schemas.openxmlformats.org/markup-compatibility/2006" xmlns:p14="http://schemas.microsoft.com/office/powerpoint/2010/main">
+    <mc:Choice Requires="p14">
       <p:transition spd="med" p14:dur="700">
         <p:fade/>
       </p:transition>
     </mc:Choice>
-    <mc:Fallback>
+    <mc:Fallback xmlns="">
       <p:transition spd="med">
         <p:fade/>
       </p:transition>
@@ -27107,13 +27107,13 @@
   <p:clrMapOvr>
     <a:masterClrMapping/>
   </p:clrMapOvr>
-  <mc:AlternateContent xmlns:mc="http://schemas.openxmlformats.org/markup-compatibility/2006">
-    <mc:Choice xmlns:p14="http://schemas.microsoft.com/office/powerpoint/2010/main" Requires="p14">
+  <mc:AlternateContent xmlns:mc="http://schemas.openxmlformats.org/markup-compatibility/2006" xmlns:p14="http://schemas.microsoft.com/office/powerpoint/2010/main">
+    <mc:Choice Requires="p14">
       <p:transition spd="med" p14:dur="700">
         <p:fade/>
       </p:transition>
     </mc:Choice>
-    <mc:Fallback>
+    <mc:Fallback xmlns="">
       <p:transition spd="med">
         <p:fade/>
       </p:transition>
@@ -27225,13 +27225,13 @@
   <p:clrMapOvr>
     <a:masterClrMapping/>
   </p:clrMapOvr>
-  <mc:AlternateContent xmlns:mc="http://schemas.openxmlformats.org/markup-compatibility/2006">
-    <mc:Choice xmlns:p14="http://schemas.microsoft.com/office/powerpoint/2010/main" Requires="p14">
+  <mc:AlternateContent xmlns:mc="http://schemas.openxmlformats.org/markup-compatibility/2006" xmlns:p14="http://schemas.microsoft.com/office/powerpoint/2010/main">
+    <mc:Choice Requires="p14">
       <p:transition spd="med" p14:dur="700">
         <p:fade/>
       </p:transition>
     </mc:Choice>
-    <mc:Fallback>
+    <mc:Fallback xmlns="">
       <p:transition spd="med">
         <p:fade/>
       </p:transition>
@@ -27884,13 +27884,13 @@
   <p:clrMapOvr>
     <a:masterClrMapping/>
   </p:clrMapOvr>
-  <mc:AlternateContent xmlns:mc="http://schemas.openxmlformats.org/markup-compatibility/2006">
-    <mc:Choice xmlns:p14="http://schemas.microsoft.com/office/powerpoint/2010/main" Requires="p14">
+  <mc:AlternateContent xmlns:mc="http://schemas.openxmlformats.org/markup-compatibility/2006" xmlns:p14="http://schemas.microsoft.com/office/powerpoint/2010/main">
+    <mc:Choice Requires="p14">
       <p:transition spd="med" p14:dur="700">
         <p:fade/>
       </p:transition>
     </mc:Choice>
-    <mc:Fallback>
+    <mc:Fallback xmlns="">
       <p:transition spd="med">
         <p:fade/>
       </p:transition>
@@ -28165,13 +28165,13 @@
   <p:clrMapOvr>
     <a:masterClrMapping/>
   </p:clrMapOvr>
-  <mc:AlternateContent xmlns:mc="http://schemas.openxmlformats.org/markup-compatibility/2006">
-    <mc:Choice xmlns:p14="http://schemas.microsoft.com/office/powerpoint/2010/main" Requires="p14">
+  <mc:AlternateContent xmlns:mc="http://schemas.openxmlformats.org/markup-compatibility/2006" xmlns:p14="http://schemas.microsoft.com/office/powerpoint/2010/main">
+    <mc:Choice Requires="p14">
       <p:transition spd="med" p14:dur="700">
         <p:fade/>
       </p:transition>
     </mc:Choice>
-    <mc:Fallback>
+    <mc:Fallback xmlns="">
       <p:transition spd="med">
         <p:fade/>
       </p:transition>
@@ -28634,13 +28634,13 @@
   <p:clrMapOvr>
     <a:masterClrMapping/>
   </p:clrMapOvr>
-  <mc:AlternateContent xmlns:mc="http://schemas.openxmlformats.org/markup-compatibility/2006">
-    <mc:Choice xmlns:p14="http://schemas.microsoft.com/office/powerpoint/2010/main" Requires="p14">
+  <mc:AlternateContent xmlns:mc="http://schemas.openxmlformats.org/markup-compatibility/2006" xmlns:p14="http://schemas.microsoft.com/office/powerpoint/2010/main">
+    <mc:Choice Requires="p14">
       <p:transition spd="med" p14:dur="700">
         <p:fade/>
       </p:transition>
     </mc:Choice>
-    <mc:Fallback>
+    <mc:Fallback xmlns="">
       <p:transition spd="med">
         <p:fade/>
       </p:transition>
